--- a/knf/decks/d4p7.pptx
+++ b/knf/decks/d4p7.pptx
@@ -5488,7 +5488,7 @@
                 <a:ea typeface="Pretendard"/>
                 <a:cs typeface="Pretendard"/>
               </a:rPr>
-              <a:t>45분 뒤에는</a:t>
+              <a:t>50분 뒤에는</a:t>
             </a:r>
           </a:p>
         </p:txBody>
@@ -6333,7 +6333,7 @@
                 <a:ea typeface="Pretendard"/>
                 <a:cs typeface="Pretendard"/>
               </a:rPr>
-              <a:t>45분 운영표 — 팀당 13분</a:t>
+              <a:t>50분 운영표 — 팀당 14분</a:t>
             </a:r>
           </a:p>
         </p:txBody>
@@ -6726,7 +6726,7 @@
                 <a:ea typeface="Pretendard"/>
                 <a:cs typeface="Pretendard"/>
               </a:rPr>
-              <a:t>3분</a:t>
+              <a:t>4분</a:t>
             </a:r>
           </a:p>
         </p:txBody>
@@ -6951,7 +6951,7 @@
                 <a:ea typeface="Pretendard"/>
                 <a:cs typeface="Pretendard"/>
               </a:rPr>
-              <a:t>13분</a:t>
+              <a:t>14분</a:t>
             </a:r>
           </a:p>
         </p:txBody>
@@ -7026,7 +7026,7 @@
                 <a:ea typeface="Pretendard"/>
                 <a:cs typeface="Pretendard"/>
               </a:rPr>
-              <a:t>발표 8분 + 질의 · 피드백 5분</a:t>
+              <a:t>발표 8분 + 질의 · 피드백 6분</a:t>
             </a:r>
           </a:p>
         </p:txBody>
@@ -7176,7 +7176,7 @@
                 <a:ea typeface="Pretendard"/>
                 <a:cs typeface="Pretendard"/>
               </a:rPr>
-              <a:t>13분</a:t>
+              <a:t>14분</a:t>
             </a:r>
           </a:p>
         </p:txBody>
@@ -7251,7 +7251,7 @@
                 <a:ea typeface="Pretendard"/>
                 <a:cs typeface="Pretendard"/>
               </a:rPr>
-              <a:t>발표 8분 + 질의 · 피드백 5분</a:t>
+              <a:t>발표 8분 + 질의 · 피드백 6분</a:t>
             </a:r>
           </a:p>
         </p:txBody>
@@ -7401,7 +7401,7 @@
                 <a:ea typeface="Pretendard"/>
                 <a:cs typeface="Pretendard"/>
               </a:rPr>
-              <a:t>13분</a:t>
+              <a:t>14분</a:t>
             </a:r>
           </a:p>
         </p:txBody>
@@ -7476,7 +7476,7 @@
                 <a:ea typeface="Pretendard"/>
                 <a:cs typeface="Pretendard"/>
               </a:rPr>
-              <a:t>발표 8분 + 질의 · 피드백 5분</a:t>
+              <a:t>발표 8분 + 질의 · 피드백 6분</a:t>
             </a:r>
           </a:p>
         </p:txBody>
@@ -7626,7 +7626,7 @@
                 <a:ea typeface="Pretendard"/>
                 <a:cs typeface="Pretendard"/>
               </a:rPr>
-              <a:t>3분</a:t>
+              <a:t>4분</a:t>
             </a:r>
           </a:p>
         </p:txBody>

--- a/knf/decks/d4p7.pptx
+++ b/knf/decks/d4p7.pptx
@@ -3100,7 +3100,7 @@
       <p:grpSpPr/>
       <p:sp>
         <p:nvSpPr>
-          <p:cNvPr id="2" name="Oval 1"/>
+          <p:cNvPr id="2" name="deckgen:decor"/>
           <p:cNvSpPr/>
           <p:nvPr/>
         </p:nvSpPr>
@@ -3130,7 +3130,7 @@
       </p:sp>
       <p:sp>
         <p:nvSpPr>
-          <p:cNvPr id="3" name="Oval 2"/>
+          <p:cNvPr id="3" name="deckgen:decor"/>
           <p:cNvSpPr/>
           <p:nvPr/>
         </p:nvSpPr>
@@ -3160,7 +3160,7 @@
       </p:sp>
       <p:sp>
         <p:nvSpPr>
-          <p:cNvPr id="4" name="Oval 3"/>
+          <p:cNvPr id="4" name="deckgen:decor"/>
           <p:cNvSpPr/>
           <p:nvPr/>
         </p:nvSpPr>
@@ -3190,7 +3190,7 @@
       </p:sp>
       <p:sp>
         <p:nvSpPr>
-          <p:cNvPr id="5" name="Rectangle 4"/>
+          <p:cNvPr id="5" name="deckgen:decor"/>
           <p:cNvSpPr/>
           <p:nvPr/>
         </p:nvSpPr>
@@ -3220,7 +3220,7 @@
       </p:sp>
       <p:sp>
         <p:nvSpPr>
-          <p:cNvPr id="6" name="Oval 5"/>
+          <p:cNvPr id="6" name="deckgen:decor"/>
           <p:cNvSpPr/>
           <p:nvPr/>
         </p:nvSpPr>
@@ -3250,7 +3250,7 @@
       </p:sp>
       <p:sp>
         <p:nvSpPr>
-          <p:cNvPr id="7" name="Oval 6"/>
+          <p:cNvPr id="7" name="deckgen:decor"/>
           <p:cNvSpPr/>
           <p:nvPr/>
         </p:nvSpPr>
@@ -3280,7 +3280,7 @@
       </p:sp>
       <p:sp>
         <p:nvSpPr>
-          <p:cNvPr id="8" name="Oval 7"/>
+          <p:cNvPr id="8" name="deckgen:decor"/>
           <p:cNvSpPr/>
           <p:nvPr/>
         </p:nvSpPr>
@@ -3310,7 +3310,7 @@
       </p:sp>
       <p:sp>
         <p:nvSpPr>
-          <p:cNvPr id="9" name="Oval 8"/>
+          <p:cNvPr id="9" name="deckgen:decor"/>
           <p:cNvSpPr/>
           <p:nvPr/>
         </p:nvSpPr>
@@ -3340,7 +3340,7 @@
       </p:sp>
       <p:sp>
         <p:nvSpPr>
-          <p:cNvPr id="10" name="Rectangle 9"/>
+          <p:cNvPr id="10" name="deckgen:decor"/>
           <p:cNvSpPr/>
           <p:nvPr/>
         </p:nvSpPr>
@@ -3600,7 +3600,7 @@
       <p:grpSpPr/>
       <p:sp>
         <p:nvSpPr>
-          <p:cNvPr id="2" name="Oval 1"/>
+          <p:cNvPr id="2" name="deckgen:decor"/>
           <p:cNvSpPr/>
           <p:nvPr/>
         </p:nvSpPr>
@@ -3630,7 +3630,7 @@
       </p:sp>
       <p:sp>
         <p:nvSpPr>
-          <p:cNvPr id="3" name="Oval 2"/>
+          <p:cNvPr id="3" name="deckgen:decor"/>
           <p:cNvSpPr/>
           <p:nvPr/>
         </p:nvSpPr>
@@ -3660,7 +3660,7 @@
       </p:sp>
       <p:sp>
         <p:nvSpPr>
-          <p:cNvPr id="4" name="Oval 3"/>
+          <p:cNvPr id="4" name="deckgen:decor"/>
           <p:cNvSpPr/>
           <p:nvPr/>
         </p:nvSpPr>
@@ -4516,7 +4516,7 @@
       <p:grpSpPr/>
       <p:sp>
         <p:nvSpPr>
-          <p:cNvPr id="2" name="Oval 1"/>
+          <p:cNvPr id="2" name="deckgen:decor"/>
           <p:cNvSpPr/>
           <p:nvPr/>
         </p:nvSpPr>
@@ -4546,7 +4546,7 @@
       </p:sp>
       <p:sp>
         <p:nvSpPr>
-          <p:cNvPr id="3" name="Oval 2"/>
+          <p:cNvPr id="3" name="deckgen:decor"/>
           <p:cNvSpPr/>
           <p:nvPr/>
         </p:nvSpPr>
@@ -5323,7 +5323,7 @@
       <p:grpSpPr/>
       <p:sp>
         <p:nvSpPr>
-          <p:cNvPr id="2" name="Oval 1"/>
+          <p:cNvPr id="2" name="deckgen:decor"/>
           <p:cNvSpPr/>
           <p:nvPr/>
         </p:nvSpPr>
@@ -5353,7 +5353,7 @@
       </p:sp>
       <p:sp>
         <p:nvSpPr>
-          <p:cNvPr id="3" name="Oval 2"/>
+          <p:cNvPr id="3" name="deckgen:decor"/>
           <p:cNvSpPr/>
           <p:nvPr/>
         </p:nvSpPr>
@@ -5383,7 +5383,7 @@
       </p:sp>
       <p:sp>
         <p:nvSpPr>
-          <p:cNvPr id="4" name="Oval 3"/>
+          <p:cNvPr id="4" name="deckgen:decor"/>
           <p:cNvSpPr/>
           <p:nvPr/>
         </p:nvSpPr>
@@ -6168,7 +6168,7 @@
       <p:grpSpPr/>
       <p:sp>
         <p:nvSpPr>
-          <p:cNvPr id="2" name="Oval 1"/>
+          <p:cNvPr id="2" name="deckgen:decor"/>
           <p:cNvSpPr/>
           <p:nvPr/>
         </p:nvSpPr>
@@ -6198,7 +6198,7 @@
       </p:sp>
       <p:sp>
         <p:nvSpPr>
-          <p:cNvPr id="3" name="Oval 2"/>
+          <p:cNvPr id="3" name="deckgen:decor"/>
           <p:cNvSpPr/>
           <p:nvPr/>
         </p:nvSpPr>
@@ -6228,7 +6228,7 @@
       </p:sp>
       <p:sp>
         <p:nvSpPr>
-          <p:cNvPr id="4" name="Oval 3"/>
+          <p:cNvPr id="4" name="deckgen:decor"/>
           <p:cNvSpPr/>
           <p:nvPr/>
         </p:nvSpPr>
@@ -7838,7 +7838,7 @@
       <p:grpSpPr/>
       <p:sp>
         <p:nvSpPr>
-          <p:cNvPr id="2" name="Oval 1"/>
+          <p:cNvPr id="2" name="deckgen:decor"/>
           <p:cNvSpPr/>
           <p:nvPr/>
         </p:nvSpPr>
@@ -7868,7 +7868,7 @@
       </p:sp>
       <p:sp>
         <p:nvSpPr>
-          <p:cNvPr id="3" name="Oval 2"/>
+          <p:cNvPr id="3" name="deckgen:decor"/>
           <p:cNvSpPr/>
           <p:nvPr/>
         </p:nvSpPr>
@@ -7898,7 +7898,7 @@
       </p:sp>
       <p:sp>
         <p:nvSpPr>
-          <p:cNvPr id="4" name="Oval 3"/>
+          <p:cNvPr id="4" name="deckgen:decor"/>
           <p:cNvSpPr/>
           <p:nvPr/>
         </p:nvSpPr>
@@ -8867,7 +8867,7 @@
       <p:grpSpPr/>
       <p:sp>
         <p:nvSpPr>
-          <p:cNvPr id="2" name="Oval 1"/>
+          <p:cNvPr id="2" name="deckgen:decor"/>
           <p:cNvSpPr/>
           <p:nvPr/>
         </p:nvSpPr>
@@ -8897,7 +8897,7 @@
       </p:sp>
       <p:sp>
         <p:nvSpPr>
-          <p:cNvPr id="3" name="Oval 2"/>
+          <p:cNvPr id="3" name="deckgen:decor"/>
           <p:cNvSpPr/>
           <p:nvPr/>
         </p:nvSpPr>
@@ -8927,7 +8927,7 @@
       </p:sp>
       <p:sp>
         <p:nvSpPr>
-          <p:cNvPr id="4" name="Oval 3"/>
+          <p:cNvPr id="4" name="deckgen:decor"/>
           <p:cNvSpPr/>
           <p:nvPr/>
         </p:nvSpPr>
@@ -9929,7 +9929,7 @@
       <p:grpSpPr/>
       <p:sp>
         <p:nvSpPr>
-          <p:cNvPr id="2" name="Oval 1"/>
+          <p:cNvPr id="2" name="deckgen:decor"/>
           <p:cNvSpPr/>
           <p:nvPr/>
         </p:nvSpPr>
@@ -9959,7 +9959,7 @@
       </p:sp>
       <p:sp>
         <p:nvSpPr>
-          <p:cNvPr id="3" name="Oval 2"/>
+          <p:cNvPr id="3" name="deckgen:decor"/>
           <p:cNvSpPr/>
           <p:nvPr/>
         </p:nvSpPr>
@@ -9989,7 +9989,7 @@
       </p:sp>
       <p:sp>
         <p:nvSpPr>
-          <p:cNvPr id="4" name="Oval 3"/>
+          <p:cNvPr id="4" name="deckgen:decor"/>
           <p:cNvSpPr/>
           <p:nvPr/>
         </p:nvSpPr>
@@ -11640,7 +11640,7 @@
       <p:grpSpPr/>
       <p:sp>
         <p:nvSpPr>
-          <p:cNvPr id="2" name="Oval 1"/>
+          <p:cNvPr id="2" name="deckgen:decor"/>
           <p:cNvSpPr/>
           <p:nvPr/>
         </p:nvSpPr>
@@ -11670,7 +11670,7 @@
       </p:sp>
       <p:sp>
         <p:nvSpPr>
-          <p:cNvPr id="3" name="Oval 2"/>
+          <p:cNvPr id="3" name="deckgen:decor"/>
           <p:cNvSpPr/>
           <p:nvPr/>
         </p:nvSpPr>
@@ -11700,7 +11700,7 @@
       </p:sp>
       <p:sp>
         <p:nvSpPr>
-          <p:cNvPr id="4" name="Oval 3"/>
+          <p:cNvPr id="4" name="deckgen:decor"/>
           <p:cNvSpPr/>
           <p:nvPr/>
         </p:nvSpPr>
@@ -12864,7 +12864,7 @@
       <p:grpSpPr/>
       <p:sp>
         <p:nvSpPr>
-          <p:cNvPr id="2" name="Oval 1"/>
+          <p:cNvPr id="2" name="deckgen:decor"/>
           <p:cNvSpPr/>
           <p:nvPr/>
         </p:nvSpPr>
@@ -12894,7 +12894,7 @@
       </p:sp>
       <p:sp>
         <p:nvSpPr>
-          <p:cNvPr id="3" name="Oval 2"/>
+          <p:cNvPr id="3" name="deckgen:decor"/>
           <p:cNvSpPr/>
           <p:nvPr/>
         </p:nvSpPr>
@@ -12924,7 +12924,7 @@
       </p:sp>
       <p:sp>
         <p:nvSpPr>
-          <p:cNvPr id="4" name="Oval 3"/>
+          <p:cNvPr id="4" name="deckgen:decor"/>
           <p:cNvSpPr/>
           <p:nvPr/>
         </p:nvSpPr>
@@ -13130,7 +13130,7 @@
       </p:sp>
       <p:sp>
         <p:nvSpPr>
-          <p:cNvPr id="10" name="TextBox 9"/>
+          <p:cNvPr id="10" name="deckgen:ornament"/>
           <p:cNvSpPr txBox="1"/>
           <p:nvPr/>
         </p:nvSpPr>
@@ -13315,7 +13315,7 @@
       </p:sp>
       <p:sp>
         <p:nvSpPr>
-          <p:cNvPr id="14" name="TextBox 13"/>
+          <p:cNvPr id="14" name="deckgen:ornament"/>
           <p:cNvSpPr txBox="1"/>
           <p:nvPr/>
         </p:nvSpPr>
@@ -13500,7 +13500,7 @@
       </p:sp>
       <p:sp>
         <p:nvSpPr>
-          <p:cNvPr id="18" name="TextBox 17"/>
+          <p:cNvPr id="18" name="deckgen:ornament"/>
           <p:cNvSpPr txBox="1"/>
           <p:nvPr/>
         </p:nvSpPr>
@@ -13751,7 +13751,7 @@
       <p:grpSpPr/>
       <p:sp>
         <p:nvSpPr>
-          <p:cNvPr id="2" name="Oval 1"/>
+          <p:cNvPr id="2" name="deckgen:decor"/>
           <p:cNvSpPr/>
           <p:nvPr/>
         </p:nvSpPr>
@@ -13781,7 +13781,7 @@
       </p:sp>
       <p:sp>
         <p:nvSpPr>
-          <p:cNvPr id="3" name="Oval 2"/>
+          <p:cNvPr id="3" name="deckgen:decor"/>
           <p:cNvSpPr/>
           <p:nvPr/>
         </p:nvSpPr>
@@ -13811,7 +13811,7 @@
       </p:sp>
       <p:sp>
         <p:nvSpPr>
-          <p:cNvPr id="4" name="Oval 3"/>
+          <p:cNvPr id="4" name="deckgen:decor"/>
           <p:cNvSpPr/>
           <p:nvPr/>
         </p:nvSpPr>
